--- a/public/fun/cards/creative/creative-37.pptx
+++ b/public/fun/cards/creative/creative-37.pptx
@@ -3085,7 +3085,7 @@
     <p:bg>
       <p:bgPr>
         <a:solidFill>
-          <a:srgbClr val="71285B"/>
+          <a:srgbClr val="00C896"/>
         </a:solidFill>
         <a:effectLst/>
       </p:bgPr>
@@ -3099,72 +3099,14 @@
       <p:grpSpPr/>
       <p:sp>
         <p:nvSpPr>
-          <p:cNvPr id="2" name="Rectangle 1"/>
-          <p:cNvSpPr/>
+          <p:cNvPr id="2" name="텍스트"/>
+          <p:cNvSpPr txBox="1"/>
           <p:nvPr/>
         </p:nvSpPr>
         <p:spPr>
           <a:xfrm>
-            <a:off x="93600" y="93600"/>
-            <a:ext cx="3052800" cy="1612800"/>
-          </a:xfrm>
-          <a:prstGeom prst="rect">
-            <a:avLst/>
-          </a:prstGeom>
-          <a:noFill/>
-          <a:ln w="10800">
-            <a:solidFill>
-              <a:srgbClr val="CF77B5"/>
-            </a:solidFill>
-          </a:ln>
-        </p:spPr>
-        <p:txBody>
-          <a:bodyPr rtlCol="0" anchor="ctr"/>
-          <a:lstStyle/>
-          <a:p>
-            <a:pPr algn="ctr"/>
-          </a:p>
-        </p:txBody>
-      </p:sp>
-      <p:sp>
-        <p:nvSpPr>
-          <p:cNvPr id="3" name="Rectangle 2"/>
-          <p:cNvSpPr/>
-          <p:nvPr/>
-        </p:nvSpPr>
-        <p:spPr>
-          <a:xfrm>
-            <a:off x="144000" y="144000"/>
-            <a:ext cx="2952000" cy="1512000"/>
-          </a:xfrm>
-          <a:prstGeom prst="rect">
-            <a:avLst/>
-          </a:prstGeom>
-          <a:noFill/>
-          <a:ln w="5400">
-            <a:solidFill>
-              <a:srgbClr val="884A75"/>
-            </a:solidFill>
-          </a:ln>
-        </p:spPr>
-        <p:txBody>
-          <a:bodyPr rtlCol="0" anchor="ctr"/>
-          <a:lstStyle/>
-          <a:p>
-            <a:pPr algn="ctr"/>
-          </a:p>
-        </p:txBody>
-      </p:sp>
-      <p:sp>
-        <p:nvSpPr>
-          <p:cNvPr id="4" name="텍스트"/>
-          <p:cNvSpPr txBox="1"/>
-          <p:nvPr/>
-        </p:nvSpPr>
-        <p:spPr>
-          <a:xfrm>
-            <a:off x="360000" y="280800"/>
-            <a:ext cx="2520000" cy="100800"/>
+            <a:off x="252000" y="223200"/>
+            <a:ext cx="2016000" cy="133351"/>
           </a:xfrm>
           <a:prstGeom prst="rect">
             <a:avLst/>
@@ -3177,15 +3119,15 @@
           </a:bodyPr>
           <a:lstStyle/>
           <a:p>
-            <a:pPr algn="ctr">
+            <a:pPr algn="l">
               <a:lnSpc>
                 <a:spcPts val="1015"/>
               </a:lnSpc>
             </a:pPr>
             <a:r>
-              <a:rPr sz="700" b="1" spc="400">
+              <a:rPr sz="700" b="1" spc="200">
                 <a:solidFill>
-                  <a:srgbClr val="CDB4C6"/>
+                  <a:srgbClr val="0E3C37"/>
                 </a:solidFill>
                 <a:latin typeface="맑은 고딕"/>
                 <a:ea typeface="맑은 고딕"/>
@@ -3197,14 +3139,43 @@
       </p:sp>
       <p:sp>
         <p:nvSpPr>
-          <p:cNvPr id="5" name="텍스트"/>
+          <p:cNvPr id="3" name="Oval 2"/>
+          <p:cNvSpPr/>
+          <p:nvPr/>
+        </p:nvSpPr>
+        <p:spPr>
+          <a:xfrm>
+            <a:off x="2955600" y="241200"/>
+            <a:ext cx="64800" cy="64800"/>
+          </a:xfrm>
+          <a:prstGeom prst="ellipse">
+            <a:avLst/>
+          </a:prstGeom>
+          <a:solidFill>
+            <a:srgbClr val="12151C"/>
+          </a:solidFill>
+          <a:ln>
+            <a:noFill/>
+          </a:ln>
+        </p:spPr>
+        <p:txBody>
+          <a:bodyPr rtlCol="0" anchor="ctr"/>
+          <a:lstStyle/>
+          <a:p>
+            <a:pPr algn="ctr"/>
+          </a:p>
+        </p:txBody>
+      </p:sp>
+      <p:sp>
+        <p:nvSpPr>
+          <p:cNvPr id="4" name="텍스트"/>
           <p:cNvSpPr txBox="1"/>
           <p:nvPr/>
         </p:nvSpPr>
         <p:spPr>
           <a:xfrm>
-            <a:off x="360000" y="468000"/>
-            <a:ext cx="2520000" cy="313692"/>
+            <a:off x="252000" y="676800"/>
+            <a:ext cx="2520000" cy="360000"/>
           </a:xfrm>
           <a:prstGeom prst="rect">
             <a:avLst/>
@@ -3217,18 +3188,18 @@
           </a:bodyPr>
           <a:lstStyle/>
           <a:p>
-            <a:pPr algn="ctr">
+            <a:pPr algn="l">
               <a:lnSpc>
-                <a:spcPts val="2755"/>
+                <a:spcPts val="3190"/>
               </a:lnSpc>
             </a:pPr>
             <a:r>
-              <a:rPr sz="1900" b="1" spc="50">
+              <a:rPr sz="2200" b="1">
                 <a:solidFill>
-                  <a:srgbClr val="FFFFFF"/>
+                  <a:srgbClr val="12151C"/>
                 </a:solidFill>
-                <a:latin typeface="바탕"/>
-                <a:ea typeface="바탕"/>
+                <a:latin typeface="맑은 고딕"/>
+                <a:ea typeface="맑은 고딕"/>
               </a:rPr>
               <a:t>방지민</a:t>
             </a:r>
@@ -3237,14 +3208,14 @@
       </p:sp>
       <p:sp>
         <p:nvSpPr>
-          <p:cNvPr id="6" name="텍스트"/>
+          <p:cNvPr id="5" name="텍스트"/>
           <p:cNvSpPr txBox="1"/>
           <p:nvPr/>
         </p:nvSpPr>
         <p:spPr>
           <a:xfrm>
-            <a:off x="360000" y="784800"/>
-            <a:ext cx="2520000" cy="122400"/>
+            <a:off x="252000" y="1080000"/>
+            <a:ext cx="2520000" cy="171451"/>
           </a:xfrm>
           <a:prstGeom prst="rect">
             <a:avLst/>
@@ -3257,15 +3228,15 @@
           </a:bodyPr>
           <a:lstStyle/>
           <a:p>
-            <a:pPr algn="ctr">
+            <a:pPr algn="l">
               <a:lnSpc>
-                <a:spcPts val="1232"/>
+                <a:spcPts val="1305"/>
               </a:lnSpc>
             </a:pPr>
             <a:r>
-              <a:rPr sz="850" b="1">
+              <a:rPr sz="900" b="0">
                 <a:solidFill>
-                  <a:srgbClr val="DDA0CB"/>
+                  <a:srgbClr val="0E3C37"/>
                 </a:solidFill>
                 <a:latin typeface="맑은 고딕"/>
                 <a:ea typeface="맑은 고딕"/>
@@ -3275,45 +3246,37 @@
           </a:p>
         </p:txBody>
       </p:sp>
-      <p:sp>
-        <p:nvSpPr>
-          <p:cNvPr id="7" name="Rectangle 6"/>
-          <p:cNvSpPr/>
+      <p:cxnSp>
+        <p:nvCxnSpPr>
+          <p:cNvPr id="6" name="Connector 5"/>
+          <p:cNvCxnSpPr/>
           <p:nvPr/>
-        </p:nvSpPr>
+        </p:nvCxnSpPr>
         <p:spPr>
           <a:xfrm>
-            <a:off x="1530000" y="993600"/>
-            <a:ext cx="180000" cy="10800"/>
+            <a:off x="252000" y="1339200"/>
+            <a:ext cx="2736000" cy="0"/>
           </a:xfrm>
-          <a:prstGeom prst="rect">
+          <a:prstGeom prst="line">
             <a:avLst/>
           </a:prstGeom>
-          <a:solidFill>
-            <a:srgbClr val="CF77B5"/>
-          </a:solidFill>
-          <a:ln>
-            <a:noFill/>
+          <a:ln w="5760">
+            <a:solidFill>
+              <a:srgbClr val="078065"/>
+            </a:solidFill>
           </a:ln>
         </p:spPr>
-        <p:txBody>
-          <a:bodyPr rtlCol="0" anchor="ctr"/>
-          <a:lstStyle/>
-          <a:p>
-            <a:pPr algn="ctr"/>
-          </a:p>
-        </p:txBody>
-      </p:sp>
-      <p:sp>
-        <p:nvSpPr>
-          <p:cNvPr id="8" name="텍스트"/>
+      </p:cxnSp>
+      <p:sp>
+        <p:nvSpPr>
+          <p:cNvPr id="7" name="텍스트"/>
           <p:cNvSpPr txBox="1"/>
           <p:nvPr/>
         </p:nvSpPr>
         <p:spPr>
           <a:xfrm>
-            <a:off x="360000" y="1087200"/>
-            <a:ext cx="2520000" cy="108000"/>
+            <a:off x="252000" y="1411200"/>
+            <a:ext cx="792000" cy="129541"/>
           </a:xfrm>
           <a:prstGeom prst="rect">
             <a:avLst/>
@@ -3326,15 +3289,15 @@
           </a:bodyPr>
           <a:lstStyle/>
           <a:p>
-            <a:pPr algn="ctr">
+            <a:pPr algn="l">
               <a:lnSpc>
-                <a:spcPts val="1087"/>
+                <a:spcPts val="986"/>
               </a:lnSpc>
             </a:pPr>
             <a:r>
-              <a:rPr sz="750" b="0">
+              <a:rPr sz="680" b="0">
                 <a:solidFill>
-                  <a:srgbClr val="FFFFFF"/>
+                  <a:srgbClr val="12151C"/>
                 </a:solidFill>
                 <a:latin typeface="맑은 고딕"/>
                 <a:ea typeface="맑은 고딕"/>
@@ -3346,14 +3309,14 @@
       </p:sp>
       <p:sp>
         <p:nvSpPr>
-          <p:cNvPr id="9" name="텍스트"/>
+          <p:cNvPr id="8" name="텍스트"/>
           <p:cNvSpPr txBox="1"/>
           <p:nvPr/>
         </p:nvSpPr>
         <p:spPr>
           <a:xfrm>
-            <a:off x="360000" y="1209600"/>
-            <a:ext cx="2520000" cy="108000"/>
+            <a:off x="1080000" y="1411200"/>
+            <a:ext cx="900000" cy="129541"/>
           </a:xfrm>
           <a:prstGeom prst="rect">
             <a:avLst/>
@@ -3366,15 +3329,15 @@
           </a:bodyPr>
           <a:lstStyle/>
           <a:p>
-            <a:pPr algn="ctr">
+            <a:pPr algn="l">
               <a:lnSpc>
-                <a:spcPts val="1087"/>
+                <a:spcPts val="986"/>
               </a:lnSpc>
             </a:pPr>
             <a:r>
-              <a:rPr sz="750" b="0">
+              <a:rPr sz="680" b="0">
                 <a:solidFill>
-                  <a:srgbClr val="FFFFFF"/>
+                  <a:srgbClr val="12151C"/>
                 </a:solidFill>
                 <a:latin typeface="맑은 고딕"/>
                 <a:ea typeface="맑은 고딕"/>
@@ -3386,14 +3349,14 @@
       </p:sp>
       <p:sp>
         <p:nvSpPr>
-          <p:cNvPr id="10" name="텍스트"/>
+          <p:cNvPr id="9" name="텍스트"/>
           <p:cNvSpPr txBox="1"/>
           <p:nvPr/>
         </p:nvSpPr>
         <p:spPr>
           <a:xfrm>
-            <a:off x="360000" y="1332000"/>
-            <a:ext cx="2520000" cy="108000"/>
+            <a:off x="2052000" y="1411200"/>
+            <a:ext cx="972000" cy="129541"/>
           </a:xfrm>
           <a:prstGeom prst="rect">
             <a:avLst/>
@@ -3406,15 +3369,15 @@
           </a:bodyPr>
           <a:lstStyle/>
           <a:p>
-            <a:pPr algn="ctr">
+            <a:pPr algn="l">
               <a:lnSpc>
-                <a:spcPts val="1015"/>
+                <a:spcPts val="986"/>
               </a:lnSpc>
             </a:pPr>
             <a:r>
-              <a:rPr sz="700" b="0">
+              <a:rPr sz="680" b="0">
                 <a:solidFill>
-                  <a:srgbClr val="CDB4C6"/>
+                  <a:srgbClr val="12151C"/>
                 </a:solidFill>
                 <a:latin typeface="맑은 고딕"/>
                 <a:ea typeface="맑은 고딕"/>
@@ -3426,69 +3389,121 @@
       </p:sp>
       <p:sp>
         <p:nvSpPr>
-          <p:cNvPr id="11" name="Freeform 10"/>
-          <p:cNvSpPr/>
+          <p:cNvPr id="10" name="텍스트"/>
+          <p:cNvSpPr txBox="1"/>
           <p:nvPr/>
         </p:nvSpPr>
         <p:spPr>
           <a:xfrm>
-            <a:off x="1560152" y="1485072"/>
-            <a:ext cx="119696" cy="113838"/>
+            <a:off x="252000" y="1526400"/>
+            <a:ext cx="216000" cy="95251"/>
           </a:xfrm>
-          <a:custGeom>
+          <a:prstGeom prst="rect">
             <a:avLst/>
-            <a:gdLst/>
-            <a:ahLst/>
-            <a:cxnLst/>
-            <a:rect l="l" t="t" r="r" b="b"/>
-            <a:pathLst>
-              <a:path w="119696" h="113838">
-                <a:moveTo>
-                  <a:pt x="59848" y="0"/>
-                </a:moveTo>
-                <a:lnTo>
-                  <a:pt x="75126" y="41900"/>
-                </a:lnTo>
-                <a:lnTo>
-                  <a:pt x="119696" y="43482"/>
-                </a:lnTo>
-                <a:lnTo>
-                  <a:pt x="84568" y="70960"/>
-                </a:lnTo>
-                <a:lnTo>
-                  <a:pt x="96836" y="113838"/>
-                </a:lnTo>
-                <a:lnTo>
-                  <a:pt x="59848" y="88920"/>
-                </a:lnTo>
-                <a:lnTo>
-                  <a:pt x="22860" y="113838"/>
-                </a:lnTo>
-                <a:lnTo>
-                  <a:pt x="35128" y="70960"/>
-                </a:lnTo>
-                <a:lnTo>
-                  <a:pt x="0" y="43482"/>
-                </a:lnTo>
-                <a:lnTo>
-                  <a:pt x="44570" y="41900"/>
-                </a:lnTo>
-                <a:close/>
-              </a:path>
-            </a:pathLst>
-          </a:custGeom>
-          <a:solidFill>
-            <a:srgbClr val="CF77B5"/>
-          </a:solidFill>
-          <a:ln>
-            <a:noFill/>
-          </a:ln>
+          </a:prstGeom>
+          <a:noFill/>
         </p:spPr>
         <p:txBody>
-          <a:bodyPr rtlCol="0" anchor="ctr"/>
-          <a:lstStyle/>
-          <a:p>
-            <a:pPr algn="ctr"/>
+          <a:bodyPr wrap="square" lIns="0" rIns="0" tIns="0" bIns="0" anchor="t">
+            <a:spAutoFit/>
+          </a:bodyPr>
+          <a:lstStyle/>
+          <a:p>
+            <a:pPr algn="l">
+              <a:lnSpc>
+                <a:spcPts val="725"/>
+              </a:lnSpc>
+            </a:pPr>
+            <a:r>
+              <a:rPr sz="500" b="1" spc="120">
+                <a:solidFill>
+                  <a:srgbClr val="0E3C37"/>
+                </a:solidFill>
+                <a:latin typeface="맑은 고딕"/>
+                <a:ea typeface="맑은 고딕"/>
+              </a:rPr>
+              <a:t>TEL</a:t>
+            </a:r>
+          </a:p>
+        </p:txBody>
+      </p:sp>
+      <p:sp>
+        <p:nvSpPr>
+          <p:cNvPr id="11" name="텍스트"/>
+          <p:cNvSpPr txBox="1"/>
+          <p:nvPr/>
+        </p:nvSpPr>
+        <p:spPr>
+          <a:xfrm>
+            <a:off x="1080000" y="1526400"/>
+            <a:ext cx="216000" cy="95251"/>
+          </a:xfrm>
+          <a:prstGeom prst="rect">
+            <a:avLst/>
+          </a:prstGeom>
+          <a:noFill/>
+        </p:spPr>
+        <p:txBody>
+          <a:bodyPr wrap="square" lIns="0" rIns="0" tIns="0" bIns="0" anchor="t">
+            <a:spAutoFit/>
+          </a:bodyPr>
+          <a:lstStyle/>
+          <a:p>
+            <a:pPr algn="l">
+              <a:lnSpc>
+                <a:spcPts val="725"/>
+              </a:lnSpc>
+            </a:pPr>
+            <a:r>
+              <a:rPr sz="500" b="1" spc="120">
+                <a:solidFill>
+                  <a:srgbClr val="0E3C37"/>
+                </a:solidFill>
+                <a:latin typeface="맑은 고딕"/>
+                <a:ea typeface="맑은 고딕"/>
+              </a:rPr>
+              <a:t>MAIL</a:t>
+            </a:r>
+          </a:p>
+        </p:txBody>
+      </p:sp>
+      <p:sp>
+        <p:nvSpPr>
+          <p:cNvPr id="12" name="텍스트"/>
+          <p:cNvSpPr txBox="1"/>
+          <p:nvPr/>
+        </p:nvSpPr>
+        <p:spPr>
+          <a:xfrm>
+            <a:off x="2052000" y="1526400"/>
+            <a:ext cx="216000" cy="95251"/>
+          </a:xfrm>
+          <a:prstGeom prst="rect">
+            <a:avLst/>
+          </a:prstGeom>
+          <a:noFill/>
+        </p:spPr>
+        <p:txBody>
+          <a:bodyPr wrap="square" lIns="0" rIns="0" tIns="0" bIns="0" anchor="t">
+            <a:spAutoFit/>
+          </a:bodyPr>
+          <a:lstStyle/>
+          <a:p>
+            <a:pPr algn="l">
+              <a:lnSpc>
+                <a:spcPts val="725"/>
+              </a:lnSpc>
+            </a:pPr>
+            <a:r>
+              <a:rPr sz="500" b="1" spc="120">
+                <a:solidFill>
+                  <a:srgbClr val="0E3C37"/>
+                </a:solidFill>
+                <a:latin typeface="맑은 고딕"/>
+                <a:ea typeface="맑은 고딕"/>
+              </a:rPr>
+              <a:t>ADDR</a:t>
+            </a:r>
           </a:p>
         </p:txBody>
       </p:sp>
@@ -3506,7 +3521,7 @@
     <p:bg>
       <p:bgPr>
         <a:solidFill>
-          <a:srgbClr val="9B367D"/>
+          <a:srgbClr val="00C896"/>
         </a:solidFill>
         <a:effectLst/>
       </p:bgPr>
@@ -3520,111 +3535,14 @@
       <p:grpSpPr/>
       <p:sp>
         <p:nvSpPr>
-          <p:cNvPr id="2" name="Rectangle 1"/>
-          <p:cNvSpPr/>
+          <p:cNvPr id="2" name="텍스트"/>
+          <p:cNvSpPr txBox="1"/>
           <p:nvPr/>
         </p:nvSpPr>
         <p:spPr>
           <a:xfrm>
-            <a:off x="0" y="0"/>
-            <a:ext cx="3240000" cy="1800000"/>
-          </a:xfrm>
-          <a:prstGeom prst="rect">
-            <a:avLst/>
-          </a:prstGeom>
-          <a:solidFill>
-            <a:srgbClr val="F1D0E7"/>
-          </a:solidFill>
-          <a:ln>
-            <a:noFill/>
-          </a:ln>
-        </p:spPr>
-        <p:txBody>
-          <a:bodyPr rtlCol="0" anchor="ctr"/>
-          <a:lstStyle/>
-          <a:p>
-            <a:pPr algn="ctr"/>
-          </a:p>
-        </p:txBody>
-      </p:sp>
-      <p:sp>
-        <p:nvSpPr>
-          <p:cNvPr id="3" name="Freeform 2"/>
-          <p:cNvSpPr/>
-          <p:nvPr/>
-        </p:nvSpPr>
-        <p:spPr>
-          <a:xfrm>
-            <a:off x="1462505" y="374400"/>
-            <a:ext cx="314990" cy="299573"/>
-          </a:xfrm>
-          <a:custGeom>
-            <a:avLst/>
-            <a:gdLst/>
-            <a:ahLst/>
-            <a:cxnLst/>
-            <a:rect l="l" t="t" r="r" b="b"/>
-            <a:pathLst>
-              <a:path w="314990" h="299573">
-                <a:moveTo>
-                  <a:pt x="157495" y="0"/>
-                </a:moveTo>
-                <a:lnTo>
-                  <a:pt x="197700" y="110263"/>
-                </a:lnTo>
-                <a:lnTo>
-                  <a:pt x="314990" y="114427"/>
-                </a:lnTo>
-                <a:lnTo>
-                  <a:pt x="222547" y="186737"/>
-                </a:lnTo>
-                <a:lnTo>
-                  <a:pt x="254832" y="299573"/>
-                </a:lnTo>
-                <a:lnTo>
-                  <a:pt x="157495" y="234000"/>
-                </a:lnTo>
-                <a:lnTo>
-                  <a:pt x="60158" y="299573"/>
-                </a:lnTo>
-                <a:lnTo>
-                  <a:pt x="92443" y="186737"/>
-                </a:lnTo>
-                <a:lnTo>
-                  <a:pt x="0" y="114427"/>
-                </a:lnTo>
-                <a:lnTo>
-                  <a:pt x="117290" y="110263"/>
-                </a:lnTo>
-                <a:close/>
-              </a:path>
-            </a:pathLst>
-          </a:custGeom>
-          <a:solidFill>
-            <a:srgbClr val="595959"/>
-          </a:solidFill>
-          <a:ln>
-            <a:noFill/>
-          </a:ln>
-        </p:spPr>
-        <p:txBody>
-          <a:bodyPr rtlCol="0" anchor="ctr"/>
-          <a:lstStyle/>
-          <a:p>
-            <a:pPr algn="ctr"/>
-          </a:p>
-        </p:txBody>
-      </p:sp>
-      <p:sp>
-        <p:nvSpPr>
-          <p:cNvPr id="4" name="텍스트"/>
-          <p:cNvSpPr txBox="1"/>
-          <p:nvPr/>
-        </p:nvSpPr>
-        <p:spPr>
-          <a:xfrm>
-            <a:off x="396000" y="835200"/>
-            <a:ext cx="2448000" cy="396000"/>
+            <a:off x="252000" y="324000"/>
+            <a:ext cx="2520000" cy="792000"/>
           </a:xfrm>
           <a:prstGeom prst="rect">
             <a:avLst/>
@@ -3632,20 +3550,20 @@
           <a:noFill/>
         </p:spPr>
         <p:txBody>
-          <a:bodyPr wrap="square" lIns="0" rIns="0" tIns="0" bIns="0" anchor="ctr">
+          <a:bodyPr wrap="square" lIns="0" rIns="0" tIns="0" bIns="0" anchor="t">
             <a:spAutoFit/>
           </a:bodyPr>
           <a:lstStyle/>
           <a:p>
-            <a:pPr algn="ctr">
+            <a:pPr algn="l">
               <a:lnSpc>
-                <a:spcPts val="1667"/>
+                <a:spcPts val="1884"/>
               </a:lnSpc>
             </a:pPr>
             <a:r>
-              <a:rPr sz="1150" b="1">
+              <a:rPr sz="1300" b="1">
                 <a:solidFill>
-                  <a:srgbClr val="595959"/>
+                  <a:srgbClr val="12151C"/>
                 </a:solidFill>
                 <a:latin typeface="맑은 고딕"/>
                 <a:ea typeface="맑은 고딕"/>
@@ -3657,14 +3575,43 @@
       </p:sp>
       <p:sp>
         <p:nvSpPr>
-          <p:cNvPr id="5" name="텍스트"/>
+          <p:cNvPr id="3" name="Rectangle 2"/>
+          <p:cNvSpPr/>
+          <p:nvPr/>
+        </p:nvSpPr>
+        <p:spPr>
+          <a:xfrm>
+            <a:off x="0" y="1476000"/>
+            <a:ext cx="3240000" cy="324000"/>
+          </a:xfrm>
+          <a:prstGeom prst="rect">
+            <a:avLst/>
+          </a:prstGeom>
+          <a:solidFill>
+            <a:srgbClr val="33D3AB"/>
+          </a:solidFill>
+          <a:ln>
+            <a:noFill/>
+          </a:ln>
+        </p:spPr>
+        <p:txBody>
+          <a:bodyPr rtlCol="0" anchor="ctr"/>
+          <a:lstStyle/>
+          <a:p>
+            <a:pPr algn="ctr"/>
+          </a:p>
+        </p:txBody>
+      </p:sp>
+      <p:sp>
+        <p:nvSpPr>
+          <p:cNvPr id="4" name="텍스트"/>
           <p:cNvSpPr txBox="1"/>
           <p:nvPr/>
         </p:nvSpPr>
         <p:spPr>
           <a:xfrm>
-            <a:off x="360000" y="1476000"/>
-            <a:ext cx="2520000" cy="108000"/>
+            <a:off x="252000" y="1569600"/>
+            <a:ext cx="1872000" cy="142876"/>
           </a:xfrm>
           <a:prstGeom prst="rect">
             <a:avLst/>
@@ -3677,21 +3624,112 @@
           </a:bodyPr>
           <a:lstStyle/>
           <a:p>
-            <a:pPr algn="ctr">
+            <a:pPr algn="l">
               <a:lnSpc>
-                <a:spcPts val="1015"/>
+                <a:spcPts val="1087"/>
               </a:lnSpc>
             </a:pPr>
             <a:r>
-              <a:rPr sz="700" b="1" spc="300">
+              <a:rPr sz="750" b="1" spc="200">
                 <a:solidFill>
-                  <a:srgbClr val="595959"/>
+                  <a:srgbClr val="12151C"/>
                 </a:solidFill>
                 <a:latin typeface="맑은 고딕"/>
                 <a:ea typeface="맑은 고딕"/>
               </a:rPr>
               <a:t>스튜디오 이름</a:t>
             </a:r>
+          </a:p>
+        </p:txBody>
+      </p:sp>
+      <p:sp>
+        <p:nvSpPr>
+          <p:cNvPr id="5" name="Oval 4"/>
+          <p:cNvSpPr/>
+          <p:nvPr/>
+        </p:nvSpPr>
+        <p:spPr>
+          <a:xfrm>
+            <a:off x="2714400" y="1616400"/>
+            <a:ext cx="43200" cy="43200"/>
+          </a:xfrm>
+          <a:prstGeom prst="ellipse">
+            <a:avLst/>
+          </a:prstGeom>
+          <a:solidFill>
+            <a:srgbClr val="12151C"/>
+          </a:solidFill>
+          <a:ln>
+            <a:noFill/>
+          </a:ln>
+        </p:spPr>
+        <p:txBody>
+          <a:bodyPr rtlCol="0" anchor="ctr"/>
+          <a:lstStyle/>
+          <a:p>
+            <a:pPr algn="ctr"/>
+          </a:p>
+        </p:txBody>
+      </p:sp>
+      <p:sp>
+        <p:nvSpPr>
+          <p:cNvPr id="6" name="Oval 5"/>
+          <p:cNvSpPr/>
+          <p:nvPr/>
+        </p:nvSpPr>
+        <p:spPr>
+          <a:xfrm>
+            <a:off x="2822400" y="1616400"/>
+            <a:ext cx="43200" cy="43200"/>
+          </a:xfrm>
+          <a:prstGeom prst="ellipse">
+            <a:avLst/>
+          </a:prstGeom>
+          <a:solidFill>
+            <a:srgbClr val="12151C">
+              <a:alpha val="50000"/>
+            </a:srgbClr>
+          </a:solidFill>
+          <a:ln>
+            <a:noFill/>
+          </a:ln>
+        </p:spPr>
+        <p:txBody>
+          <a:bodyPr rtlCol="0" anchor="ctr"/>
+          <a:lstStyle/>
+          <a:p>
+            <a:pPr algn="ctr"/>
+          </a:p>
+        </p:txBody>
+      </p:sp>
+      <p:sp>
+        <p:nvSpPr>
+          <p:cNvPr id="7" name="Oval 6"/>
+          <p:cNvSpPr/>
+          <p:nvPr/>
+        </p:nvSpPr>
+        <p:spPr>
+          <a:xfrm>
+            <a:off x="2930400" y="1616400"/>
+            <a:ext cx="43200" cy="43200"/>
+          </a:xfrm>
+          <a:prstGeom prst="ellipse">
+            <a:avLst/>
+          </a:prstGeom>
+          <a:solidFill>
+            <a:srgbClr val="12151C">
+              <a:alpha val="50000"/>
+            </a:srgbClr>
+          </a:solidFill>
+          <a:ln>
+            <a:noFill/>
+          </a:ln>
+        </p:spPr>
+        <p:txBody>
+          <a:bodyPr rtlCol="0" anchor="ctr"/>
+          <a:lstStyle/>
+          <a:p>
+            <a:pPr algn="ctr"/>
           </a:p>
         </p:txBody>
       </p:sp>

--- a/public/fun/cards/creative/creative-37.pptx
+++ b/public/fun/cards/creative/creative-37.pptx
@@ -3099,56 +3099,45 @@
       <p:grpSpPr/>
       <p:sp>
         <p:nvSpPr>
-          <p:cNvPr id="2" name="텍스트"/>
-          <p:cNvSpPr txBox="1"/>
+          <p:cNvPr id="2" name="Rectangle 1"/>
+          <p:cNvSpPr/>
           <p:nvPr/>
         </p:nvSpPr>
         <p:spPr>
           <a:xfrm>
-            <a:off x="252000" y="223200"/>
-            <a:ext cx="2016000" cy="133351"/>
+            <a:off x="93600" y="93600"/>
+            <a:ext cx="3052800" cy="1612800"/>
           </a:xfrm>
           <a:prstGeom prst="rect">
             <a:avLst/>
           </a:prstGeom>
           <a:noFill/>
-        </p:spPr>
-        <p:txBody>
-          <a:bodyPr wrap="square" lIns="0" rIns="0" tIns="0" bIns="0" anchor="t">
-            <a:spAutoFit/>
-          </a:bodyPr>
-          <a:lstStyle/>
-          <a:p>
-            <a:pPr algn="l">
-              <a:lnSpc>
-                <a:spcPts val="1015"/>
-              </a:lnSpc>
-            </a:pPr>
-            <a:r>
-              <a:rPr sz="700" b="1" spc="200">
-                <a:solidFill>
-                  <a:srgbClr val="0E3C37"/>
-                </a:solidFill>
-                <a:latin typeface="맑은 고딕"/>
-                <a:ea typeface="맑은 고딕"/>
-              </a:rPr>
-              <a:t>스튜디오 이름</a:t>
-            </a:r>
-          </a:p>
-        </p:txBody>
-      </p:sp>
-      <p:sp>
-        <p:nvSpPr>
-          <p:cNvPr id="3" name="Oval 2"/>
+          <a:ln w="3600">
+            <a:solidFill>
+              <a:srgbClr val="078065"/>
+            </a:solidFill>
+          </a:ln>
+        </p:spPr>
+        <p:txBody>
+          <a:bodyPr rtlCol="0" anchor="ctr"/>
+          <a:lstStyle/>
+          <a:p>
+            <a:pPr algn="ctr"/>
+          </a:p>
+        </p:txBody>
+      </p:sp>
+      <p:sp>
+        <p:nvSpPr>
+          <p:cNvPr id="3" name="Rectangle 2"/>
           <p:cNvSpPr/>
           <p:nvPr/>
         </p:nvSpPr>
         <p:spPr>
           <a:xfrm>
-            <a:off x="2955600" y="241200"/>
-            <a:ext cx="64800" cy="64800"/>
-          </a:xfrm>
-          <a:prstGeom prst="ellipse">
+            <a:off x="252000" y="252000"/>
+            <a:ext cx="79200" cy="79200"/>
+          </a:xfrm>
+          <a:prstGeom prst="rect">
             <a:avLst/>
           </a:prstGeom>
           <a:solidFill>
@@ -3174,8 +3163,8 @@
         </p:nvSpPr>
         <p:spPr>
           <a:xfrm>
-            <a:off x="252000" y="676800"/>
-            <a:ext cx="2520000" cy="360000"/>
+            <a:off x="396000" y="259200"/>
+            <a:ext cx="1512000" cy="123826"/>
           </a:xfrm>
           <a:prstGeom prst="rect">
             <a:avLst/>
@@ -3190,11 +3179,72 @@
           <a:p>
             <a:pPr algn="l">
               <a:lnSpc>
-                <a:spcPts val="3190"/>
+                <a:spcPts val="942"/>
               </a:lnSpc>
             </a:pPr>
             <a:r>
-              <a:rPr sz="2200" b="1">
+              <a:rPr sz="650" b="1" spc="220">
+                <a:solidFill>
+                  <a:srgbClr val="0E3C37"/>
+                </a:solidFill>
+                <a:latin typeface="맑은 고딕"/>
+                <a:ea typeface="맑은 고딕"/>
+              </a:rPr>
+              <a:t>스튜디오 이름</a:t>
+            </a:r>
+          </a:p>
+        </p:txBody>
+      </p:sp>
+      <p:cxnSp>
+        <p:nvCxnSpPr>
+          <p:cNvPr id="5" name="Connector 4"/>
+          <p:cNvCxnSpPr/>
+          <p:nvPr/>
+        </p:nvCxnSpPr>
+        <p:spPr>
+          <a:xfrm>
+            <a:off x="252000" y="446400"/>
+            <a:ext cx="2736000" cy="0"/>
+          </a:xfrm>
+          <a:prstGeom prst="line">
+            <a:avLst/>
+          </a:prstGeom>
+          <a:ln w="3600">
+            <a:solidFill>
+              <a:srgbClr val="078065"/>
+            </a:solidFill>
+          </a:ln>
+        </p:spPr>
+      </p:cxnSp>
+      <p:sp>
+        <p:nvSpPr>
+          <p:cNvPr id="6" name="텍스트"/>
+          <p:cNvSpPr txBox="1"/>
+          <p:nvPr/>
+        </p:nvSpPr>
+        <p:spPr>
+          <a:xfrm>
+            <a:off x="252000" y="964800"/>
+            <a:ext cx="1800000" cy="237600"/>
+          </a:xfrm>
+          <a:prstGeom prst="rect">
+            <a:avLst/>
+          </a:prstGeom>
+          <a:noFill/>
+        </p:spPr>
+        <p:txBody>
+          <a:bodyPr wrap="square" lIns="0" rIns="0" tIns="0" bIns="0" anchor="t">
+            <a:spAutoFit/>
+          </a:bodyPr>
+          <a:lstStyle/>
+          <a:p>
+            <a:pPr algn="l">
+              <a:lnSpc>
+                <a:spcPts val="1957"/>
+              </a:lnSpc>
+            </a:pPr>
+            <a:r>
+              <a:rPr sz="1350" b="1" spc="120">
                 <a:solidFill>
                   <a:srgbClr val="12151C"/>
                 </a:solidFill>
@@ -3208,14 +3258,14 @@
       </p:sp>
       <p:sp>
         <p:nvSpPr>
-          <p:cNvPr id="5" name="텍스트"/>
+          <p:cNvPr id="7" name="텍스트"/>
           <p:cNvSpPr txBox="1"/>
           <p:nvPr/>
         </p:nvSpPr>
         <p:spPr>
           <a:xfrm>
-            <a:off x="252000" y="1080000"/>
-            <a:ext cx="2520000" cy="171451"/>
+            <a:off x="252000" y="1216800"/>
+            <a:ext cx="1800000" cy="133351"/>
           </a:xfrm>
           <a:prstGeom prst="rect">
             <a:avLst/>
@@ -3230,11 +3280,11 @@
           <a:p>
             <a:pPr algn="l">
               <a:lnSpc>
-                <a:spcPts val="1305"/>
+                <a:spcPts val="1015"/>
               </a:lnSpc>
             </a:pPr>
             <a:r>
-              <a:rPr sz="900" b="0">
+              <a:rPr sz="700" b="0" spc="60">
                 <a:solidFill>
                   <a:srgbClr val="0E3C37"/>
                 </a:solidFill>
@@ -3248,19 +3298,19 @@
       </p:sp>
       <p:cxnSp>
         <p:nvCxnSpPr>
-          <p:cNvPr id="6" name="Connector 5"/>
+          <p:cNvPr id="8" name="Connector 7"/>
           <p:cNvCxnSpPr/>
           <p:nvPr/>
         </p:nvCxnSpPr>
         <p:spPr>
           <a:xfrm>
-            <a:off x="252000" y="1339200"/>
-            <a:ext cx="2736000" cy="0"/>
+            <a:off x="1872000" y="943200"/>
+            <a:ext cx="0" cy="604800"/>
           </a:xfrm>
           <a:prstGeom prst="line">
             <a:avLst/>
           </a:prstGeom>
-          <a:ln w="5760">
+          <a:ln w="3600">
             <a:solidFill>
               <a:srgbClr val="078065"/>
             </a:solidFill>
@@ -3269,14 +3319,14 @@
       </p:cxnSp>
       <p:sp>
         <p:nvSpPr>
-          <p:cNvPr id="7" name="텍스트"/>
+          <p:cNvPr id="9" name="텍스트"/>
           <p:cNvSpPr txBox="1"/>
           <p:nvPr/>
         </p:nvSpPr>
         <p:spPr>
           <a:xfrm>
-            <a:off x="252000" y="1411200"/>
-            <a:ext cx="792000" cy="129541"/>
+            <a:off x="2016000" y="1033200"/>
+            <a:ext cx="302400" cy="91441"/>
           </a:xfrm>
           <a:prstGeom prst="rect">
             <a:avLst/>
@@ -3291,11 +3341,51 @@
           <a:p>
             <a:pPr algn="l">
               <a:lnSpc>
-                <a:spcPts val="986"/>
+                <a:spcPts val="696"/>
               </a:lnSpc>
             </a:pPr>
             <a:r>
-              <a:rPr sz="680" b="0">
+              <a:rPr sz="480" b="1" spc="140">
+                <a:solidFill>
+                  <a:srgbClr val="0E3C37"/>
+                </a:solidFill>
+                <a:latin typeface="맑은 고딕"/>
+                <a:ea typeface="맑은 고딕"/>
+              </a:rPr>
+              <a:t>TEL</a:t>
+            </a:r>
+          </a:p>
+        </p:txBody>
+      </p:sp>
+      <p:sp>
+        <p:nvSpPr>
+          <p:cNvPr id="10" name="텍스트"/>
+          <p:cNvSpPr txBox="1"/>
+          <p:nvPr/>
+        </p:nvSpPr>
+        <p:spPr>
+          <a:xfrm>
+            <a:off x="2318400" y="1022400"/>
+            <a:ext cx="972000" cy="123826"/>
+          </a:xfrm>
+          <a:prstGeom prst="rect">
+            <a:avLst/>
+          </a:prstGeom>
+          <a:noFill/>
+        </p:spPr>
+        <p:txBody>
+          <a:bodyPr wrap="square" lIns="0" rIns="0" tIns="0" bIns="0" anchor="t">
+            <a:spAutoFit/>
+          </a:bodyPr>
+          <a:lstStyle/>
+          <a:p>
+            <a:pPr algn="l">
+              <a:lnSpc>
+                <a:spcPts val="942"/>
+              </a:lnSpc>
+            </a:pPr>
+            <a:r>
+              <a:rPr sz="650" b="0">
                 <a:solidFill>
                   <a:srgbClr val="12151C"/>
                 </a:solidFill>
@@ -3309,14 +3399,14 @@
       </p:sp>
       <p:sp>
         <p:nvSpPr>
-          <p:cNvPr id="8" name="텍스트"/>
+          <p:cNvPr id="11" name="텍스트"/>
           <p:cNvSpPr txBox="1"/>
           <p:nvPr/>
         </p:nvSpPr>
         <p:spPr>
           <a:xfrm>
-            <a:off x="1080000" y="1411200"/>
-            <a:ext cx="900000" cy="129541"/>
+            <a:off x="2016000" y="1177200"/>
+            <a:ext cx="302400" cy="91441"/>
           </a:xfrm>
           <a:prstGeom prst="rect">
             <a:avLst/>
@@ -3331,11 +3421,51 @@
           <a:p>
             <a:pPr algn="l">
               <a:lnSpc>
-                <a:spcPts val="986"/>
+                <a:spcPts val="696"/>
               </a:lnSpc>
             </a:pPr>
             <a:r>
-              <a:rPr sz="680" b="0">
+              <a:rPr sz="480" b="1" spc="140">
+                <a:solidFill>
+                  <a:srgbClr val="0E3C37"/>
+                </a:solidFill>
+                <a:latin typeface="맑은 고딕"/>
+                <a:ea typeface="맑은 고딕"/>
+              </a:rPr>
+              <a:t>MAIL</a:t>
+            </a:r>
+          </a:p>
+        </p:txBody>
+      </p:sp>
+      <p:sp>
+        <p:nvSpPr>
+          <p:cNvPr id="12" name="텍스트"/>
+          <p:cNvSpPr txBox="1"/>
+          <p:nvPr/>
+        </p:nvSpPr>
+        <p:spPr>
+          <a:xfrm>
+            <a:off x="2318400" y="1166400"/>
+            <a:ext cx="972000" cy="123826"/>
+          </a:xfrm>
+          <a:prstGeom prst="rect">
+            <a:avLst/>
+          </a:prstGeom>
+          <a:noFill/>
+        </p:spPr>
+        <p:txBody>
+          <a:bodyPr wrap="square" lIns="0" rIns="0" tIns="0" bIns="0" anchor="t">
+            <a:spAutoFit/>
+          </a:bodyPr>
+          <a:lstStyle/>
+          <a:p>
+            <a:pPr algn="l">
+              <a:lnSpc>
+                <a:spcPts val="942"/>
+              </a:lnSpc>
+            </a:pPr>
+            <a:r>
+              <a:rPr sz="650" b="0">
                 <a:solidFill>
                   <a:srgbClr val="12151C"/>
                 </a:solidFill>
@@ -3349,14 +3479,14 @@
       </p:sp>
       <p:sp>
         <p:nvSpPr>
-          <p:cNvPr id="9" name="텍스트"/>
+          <p:cNvPr id="13" name="텍스트"/>
           <p:cNvSpPr txBox="1"/>
           <p:nvPr/>
         </p:nvSpPr>
         <p:spPr>
           <a:xfrm>
-            <a:off x="2052000" y="1411200"/>
-            <a:ext cx="972000" cy="129541"/>
+            <a:off x="2016000" y="1321200"/>
+            <a:ext cx="302400" cy="91441"/>
           </a:xfrm>
           <a:prstGeom prst="rect">
             <a:avLst/>
@@ -3371,11 +3501,51 @@
           <a:p>
             <a:pPr algn="l">
               <a:lnSpc>
-                <a:spcPts val="986"/>
+                <a:spcPts val="696"/>
               </a:lnSpc>
             </a:pPr>
             <a:r>
-              <a:rPr sz="680" b="0">
+              <a:rPr sz="480" b="1" spc="140">
+                <a:solidFill>
+                  <a:srgbClr val="0E3C37"/>
+                </a:solidFill>
+                <a:latin typeface="맑은 고딕"/>
+                <a:ea typeface="맑은 고딕"/>
+              </a:rPr>
+              <a:t>ADDR</a:t>
+            </a:r>
+          </a:p>
+        </p:txBody>
+      </p:sp>
+      <p:sp>
+        <p:nvSpPr>
+          <p:cNvPr id="14" name="텍스트"/>
+          <p:cNvSpPr txBox="1"/>
+          <p:nvPr/>
+        </p:nvSpPr>
+        <p:spPr>
+          <a:xfrm>
+            <a:off x="2318400" y="1310400"/>
+            <a:ext cx="972000" cy="123826"/>
+          </a:xfrm>
+          <a:prstGeom prst="rect">
+            <a:avLst/>
+          </a:prstGeom>
+          <a:noFill/>
+        </p:spPr>
+        <p:txBody>
+          <a:bodyPr wrap="square" lIns="0" rIns="0" tIns="0" bIns="0" anchor="t">
+            <a:spAutoFit/>
+          </a:bodyPr>
+          <a:lstStyle/>
+          <a:p>
+            <a:pPr algn="l">
+              <a:lnSpc>
+                <a:spcPts val="942"/>
+              </a:lnSpc>
+            </a:pPr>
+            <a:r>
+              <a:rPr sz="650" b="0">
                 <a:solidFill>
                   <a:srgbClr val="12151C"/>
                 </a:solidFill>
@@ -3383,126 +3553,6 @@
                 <a:ea typeface="맑은 고딕"/>
               </a:rPr>
               <a:t>주소를 입력해 주세요</a:t>
-            </a:r>
-          </a:p>
-        </p:txBody>
-      </p:sp>
-      <p:sp>
-        <p:nvSpPr>
-          <p:cNvPr id="10" name="텍스트"/>
-          <p:cNvSpPr txBox="1"/>
-          <p:nvPr/>
-        </p:nvSpPr>
-        <p:spPr>
-          <a:xfrm>
-            <a:off x="252000" y="1526400"/>
-            <a:ext cx="216000" cy="95251"/>
-          </a:xfrm>
-          <a:prstGeom prst="rect">
-            <a:avLst/>
-          </a:prstGeom>
-          <a:noFill/>
-        </p:spPr>
-        <p:txBody>
-          <a:bodyPr wrap="square" lIns="0" rIns="0" tIns="0" bIns="0" anchor="t">
-            <a:spAutoFit/>
-          </a:bodyPr>
-          <a:lstStyle/>
-          <a:p>
-            <a:pPr algn="l">
-              <a:lnSpc>
-                <a:spcPts val="725"/>
-              </a:lnSpc>
-            </a:pPr>
-            <a:r>
-              <a:rPr sz="500" b="1" spc="120">
-                <a:solidFill>
-                  <a:srgbClr val="0E3C37"/>
-                </a:solidFill>
-                <a:latin typeface="맑은 고딕"/>
-                <a:ea typeface="맑은 고딕"/>
-              </a:rPr>
-              <a:t>TEL</a:t>
-            </a:r>
-          </a:p>
-        </p:txBody>
-      </p:sp>
-      <p:sp>
-        <p:nvSpPr>
-          <p:cNvPr id="11" name="텍스트"/>
-          <p:cNvSpPr txBox="1"/>
-          <p:nvPr/>
-        </p:nvSpPr>
-        <p:spPr>
-          <a:xfrm>
-            <a:off x="1080000" y="1526400"/>
-            <a:ext cx="216000" cy="95251"/>
-          </a:xfrm>
-          <a:prstGeom prst="rect">
-            <a:avLst/>
-          </a:prstGeom>
-          <a:noFill/>
-        </p:spPr>
-        <p:txBody>
-          <a:bodyPr wrap="square" lIns="0" rIns="0" tIns="0" bIns="0" anchor="t">
-            <a:spAutoFit/>
-          </a:bodyPr>
-          <a:lstStyle/>
-          <a:p>
-            <a:pPr algn="l">
-              <a:lnSpc>
-                <a:spcPts val="725"/>
-              </a:lnSpc>
-            </a:pPr>
-            <a:r>
-              <a:rPr sz="500" b="1" spc="120">
-                <a:solidFill>
-                  <a:srgbClr val="0E3C37"/>
-                </a:solidFill>
-                <a:latin typeface="맑은 고딕"/>
-                <a:ea typeface="맑은 고딕"/>
-              </a:rPr>
-              <a:t>MAIL</a:t>
-            </a:r>
-          </a:p>
-        </p:txBody>
-      </p:sp>
-      <p:sp>
-        <p:nvSpPr>
-          <p:cNvPr id="12" name="텍스트"/>
-          <p:cNvSpPr txBox="1"/>
-          <p:nvPr/>
-        </p:nvSpPr>
-        <p:spPr>
-          <a:xfrm>
-            <a:off x="2052000" y="1526400"/>
-            <a:ext cx="216000" cy="95251"/>
-          </a:xfrm>
-          <a:prstGeom prst="rect">
-            <a:avLst/>
-          </a:prstGeom>
-          <a:noFill/>
-        </p:spPr>
-        <p:txBody>
-          <a:bodyPr wrap="square" lIns="0" rIns="0" tIns="0" bIns="0" anchor="t">
-            <a:spAutoFit/>
-          </a:bodyPr>
-          <a:lstStyle/>
-          <a:p>
-            <a:pPr algn="l">
-              <a:lnSpc>
-                <a:spcPts val="725"/>
-              </a:lnSpc>
-            </a:pPr>
-            <a:r>
-              <a:rPr sz="500" b="1" spc="120">
-                <a:solidFill>
-                  <a:srgbClr val="0E3C37"/>
-                </a:solidFill>
-                <a:latin typeface="맑은 고딕"/>
-                <a:ea typeface="맑은 고딕"/>
-              </a:rPr>
-              <a:t>ADDR</a:t>
             </a:r>
           </a:p>
         </p:txBody>
@@ -3541,8 +3591,8 @@
         </p:nvSpPr>
         <p:spPr>
           <a:xfrm>
-            <a:off x="252000" y="324000"/>
-            <a:ext cx="2520000" cy="792000"/>
+            <a:off x="252000" y="252000"/>
+            <a:ext cx="1080000" cy="99061"/>
           </a:xfrm>
           <a:prstGeom prst="rect">
             <a:avLst/>
@@ -3557,18 +3607,18 @@
           <a:p>
             <a:pPr algn="l">
               <a:lnSpc>
-                <a:spcPts val="1884"/>
+                <a:spcPts val="754"/>
               </a:lnSpc>
             </a:pPr>
             <a:r>
-              <a:rPr sz="1300" b="1">
+              <a:rPr sz="520" b="1" spc="240">
                 <a:solidFill>
-                  <a:srgbClr val="12151C"/>
+                  <a:srgbClr val="0E3C37"/>
                 </a:solidFill>
                 <a:latin typeface="맑은 고딕"/>
                 <a:ea typeface="맑은 고딕"/>
               </a:rPr>
-              <a:t>여백에도 이야기를 담습니다</a:t>
+              <a:t>작업 분야</a:t>
             </a:r>
           </a:p>
         </p:txBody>
@@ -3581,79 +3631,10 @@
         </p:nvSpPr>
         <p:spPr>
           <a:xfrm>
-            <a:off x="0" y="1476000"/>
-            <a:ext cx="3240000" cy="324000"/>
+            <a:off x="252000" y="352800"/>
+            <a:ext cx="108000" cy="14400"/>
           </a:xfrm>
           <a:prstGeom prst="rect">
-            <a:avLst/>
-          </a:prstGeom>
-          <a:solidFill>
-            <a:srgbClr val="33D3AB"/>
-          </a:solidFill>
-          <a:ln>
-            <a:noFill/>
-          </a:ln>
-        </p:spPr>
-        <p:txBody>
-          <a:bodyPr rtlCol="0" anchor="ctr"/>
-          <a:lstStyle/>
-          <a:p>
-            <a:pPr algn="ctr"/>
-          </a:p>
-        </p:txBody>
-      </p:sp>
-      <p:sp>
-        <p:nvSpPr>
-          <p:cNvPr id="4" name="텍스트"/>
-          <p:cNvSpPr txBox="1"/>
-          <p:nvPr/>
-        </p:nvSpPr>
-        <p:spPr>
-          <a:xfrm>
-            <a:off x="252000" y="1569600"/>
-            <a:ext cx="1872000" cy="142876"/>
-          </a:xfrm>
-          <a:prstGeom prst="rect">
-            <a:avLst/>
-          </a:prstGeom>
-          <a:noFill/>
-        </p:spPr>
-        <p:txBody>
-          <a:bodyPr wrap="square" lIns="0" rIns="0" tIns="0" bIns="0" anchor="t">
-            <a:spAutoFit/>
-          </a:bodyPr>
-          <a:lstStyle/>
-          <a:p>
-            <a:pPr algn="l">
-              <a:lnSpc>
-                <a:spcPts val="1087"/>
-              </a:lnSpc>
-            </a:pPr>
-            <a:r>
-              <a:rPr sz="750" b="1" spc="200">
-                <a:solidFill>
-                  <a:srgbClr val="12151C"/>
-                </a:solidFill>
-                <a:latin typeface="맑은 고딕"/>
-                <a:ea typeface="맑은 고딕"/>
-              </a:rPr>
-              <a:t>스튜디오 이름</a:t>
-            </a:r>
-          </a:p>
-        </p:txBody>
-      </p:sp>
-      <p:sp>
-        <p:nvSpPr>
-          <p:cNvPr id="5" name="Oval 4"/>
-          <p:cNvSpPr/>
-          <p:nvPr/>
-        </p:nvSpPr>
-        <p:spPr>
-          <a:xfrm>
-            <a:off x="2714400" y="1616400"/>
-            <a:ext cx="43200" cy="43200"/>
-          </a:xfrm>
-          <a:prstGeom prst="ellipse">
             <a:avLst/>
           </a:prstGeom>
           <a:solidFill>
@@ -3671,27 +3652,291 @@
           </a:p>
         </p:txBody>
       </p:sp>
-      <p:sp>
-        <p:nvSpPr>
-          <p:cNvPr id="6" name="Oval 5"/>
+      <p:cxnSp>
+        <p:nvCxnSpPr>
+          <p:cNvPr id="4" name="Connector 3"/>
+          <p:cNvCxnSpPr/>
+          <p:nvPr/>
+        </p:nvCxnSpPr>
+        <p:spPr>
+          <a:xfrm>
+            <a:off x="252000" y="468000"/>
+            <a:ext cx="1512000" cy="0"/>
+          </a:xfrm>
+          <a:prstGeom prst="line">
+            <a:avLst/>
+          </a:prstGeom>
+          <a:ln w="3600">
+            <a:solidFill>
+              <a:srgbClr val="078065"/>
+            </a:solidFill>
+          </a:ln>
+        </p:spPr>
+      </p:cxnSp>
+      <p:sp>
+        <p:nvSpPr>
+          <p:cNvPr id="5" name="텍스트"/>
+          <p:cNvSpPr txBox="1"/>
+          <p:nvPr/>
+        </p:nvSpPr>
+        <p:spPr>
+          <a:xfrm>
+            <a:off x="252000" y="511200"/>
+            <a:ext cx="1260000" cy="133351"/>
+          </a:xfrm>
+          <a:prstGeom prst="rect">
+            <a:avLst/>
+          </a:prstGeom>
+          <a:noFill/>
+        </p:spPr>
+        <p:txBody>
+          <a:bodyPr wrap="square" lIns="0" rIns="0" tIns="0" bIns="0" anchor="t">
+            <a:spAutoFit/>
+          </a:bodyPr>
+          <a:lstStyle/>
+          <a:p>
+            <a:pPr algn="l">
+              <a:lnSpc>
+                <a:spcPts val="1015"/>
+              </a:lnSpc>
+            </a:pPr>
+            <a:r>
+              <a:rPr sz="700" b="0">
+                <a:solidFill>
+                  <a:srgbClr val="12151C"/>
+                </a:solidFill>
+                <a:latin typeface="맑은 고딕"/>
+                <a:ea typeface="맑은 고딕"/>
+              </a:rPr>
+              <a:t>브랜딩</a:t>
+            </a:r>
+          </a:p>
+        </p:txBody>
+      </p:sp>
+      <p:cxnSp>
+        <p:nvCxnSpPr>
+          <p:cNvPr id="6" name="Connector 5"/>
+          <p:cNvCxnSpPr/>
+          <p:nvPr/>
+        </p:nvCxnSpPr>
+        <p:spPr>
+          <a:xfrm>
+            <a:off x="252000" y="655200"/>
+            <a:ext cx="1512000" cy="0"/>
+          </a:xfrm>
+          <a:prstGeom prst="line">
+            <a:avLst/>
+          </a:prstGeom>
+          <a:ln w="3600">
+            <a:solidFill>
+              <a:srgbClr val="078065"/>
+            </a:solidFill>
+          </a:ln>
+        </p:spPr>
+      </p:cxnSp>
+      <p:sp>
+        <p:nvSpPr>
+          <p:cNvPr id="7" name="텍스트"/>
+          <p:cNvSpPr txBox="1"/>
+          <p:nvPr/>
+        </p:nvSpPr>
+        <p:spPr>
+          <a:xfrm>
+            <a:off x="252000" y="698400"/>
+            <a:ext cx="1260000" cy="133351"/>
+          </a:xfrm>
+          <a:prstGeom prst="rect">
+            <a:avLst/>
+          </a:prstGeom>
+          <a:noFill/>
+        </p:spPr>
+        <p:txBody>
+          <a:bodyPr wrap="square" lIns="0" rIns="0" tIns="0" bIns="0" anchor="t">
+            <a:spAutoFit/>
+          </a:bodyPr>
+          <a:lstStyle/>
+          <a:p>
+            <a:pPr algn="l">
+              <a:lnSpc>
+                <a:spcPts val="1015"/>
+              </a:lnSpc>
+            </a:pPr>
+            <a:r>
+              <a:rPr sz="700" b="0">
+                <a:solidFill>
+                  <a:srgbClr val="12151C"/>
+                </a:solidFill>
+                <a:latin typeface="맑은 고딕"/>
+                <a:ea typeface="맑은 고딕"/>
+              </a:rPr>
+              <a:t>로고 디자인</a:t>
+            </a:r>
+          </a:p>
+        </p:txBody>
+      </p:sp>
+      <p:cxnSp>
+        <p:nvCxnSpPr>
+          <p:cNvPr id="8" name="Connector 7"/>
+          <p:cNvCxnSpPr/>
+          <p:nvPr/>
+        </p:nvCxnSpPr>
+        <p:spPr>
+          <a:xfrm>
+            <a:off x="252000" y="842400"/>
+            <a:ext cx="1512000" cy="0"/>
+          </a:xfrm>
+          <a:prstGeom prst="line">
+            <a:avLst/>
+          </a:prstGeom>
+          <a:ln w="3600">
+            <a:solidFill>
+              <a:srgbClr val="078065"/>
+            </a:solidFill>
+          </a:ln>
+        </p:spPr>
+      </p:cxnSp>
+      <p:sp>
+        <p:nvSpPr>
+          <p:cNvPr id="9" name="텍스트"/>
+          <p:cNvSpPr txBox="1"/>
+          <p:nvPr/>
+        </p:nvSpPr>
+        <p:spPr>
+          <a:xfrm>
+            <a:off x="252000" y="885600"/>
+            <a:ext cx="1260000" cy="133351"/>
+          </a:xfrm>
+          <a:prstGeom prst="rect">
+            <a:avLst/>
+          </a:prstGeom>
+          <a:noFill/>
+        </p:spPr>
+        <p:txBody>
+          <a:bodyPr wrap="square" lIns="0" rIns="0" tIns="0" bIns="0" anchor="t">
+            <a:spAutoFit/>
+          </a:bodyPr>
+          <a:lstStyle/>
+          <a:p>
+            <a:pPr algn="l">
+              <a:lnSpc>
+                <a:spcPts val="1015"/>
+              </a:lnSpc>
+            </a:pPr>
+            <a:r>
+              <a:rPr sz="700" b="0">
+                <a:solidFill>
+                  <a:srgbClr val="12151C"/>
+                </a:solidFill>
+                <a:latin typeface="맑은 고딕"/>
+                <a:ea typeface="맑은 고딕"/>
+              </a:rPr>
+              <a:t>웹툰</a:t>
+            </a:r>
+          </a:p>
+        </p:txBody>
+      </p:sp>
+      <p:cxnSp>
+        <p:nvCxnSpPr>
+          <p:cNvPr id="10" name="Connector 9"/>
+          <p:cNvCxnSpPr/>
+          <p:nvPr/>
+        </p:nvCxnSpPr>
+        <p:spPr>
+          <a:xfrm>
+            <a:off x="252000" y="1029600"/>
+            <a:ext cx="1512000" cy="0"/>
+          </a:xfrm>
+          <a:prstGeom prst="line">
+            <a:avLst/>
+          </a:prstGeom>
+          <a:ln w="3600">
+            <a:solidFill>
+              <a:srgbClr val="078065"/>
+            </a:solidFill>
+          </a:ln>
+        </p:spPr>
+      </p:cxnSp>
+      <p:sp>
+        <p:nvSpPr>
+          <p:cNvPr id="11" name="텍스트"/>
+          <p:cNvSpPr txBox="1"/>
+          <p:nvPr/>
+        </p:nvSpPr>
+        <p:spPr>
+          <a:xfrm>
+            <a:off x="252000" y="1072800"/>
+            <a:ext cx="1260000" cy="133351"/>
+          </a:xfrm>
+          <a:prstGeom prst="rect">
+            <a:avLst/>
+          </a:prstGeom>
+          <a:noFill/>
+        </p:spPr>
+        <p:txBody>
+          <a:bodyPr wrap="square" lIns="0" rIns="0" tIns="0" bIns="0" anchor="t">
+            <a:spAutoFit/>
+          </a:bodyPr>
+          <a:lstStyle/>
+          <a:p>
+            <a:pPr algn="l">
+              <a:lnSpc>
+                <a:spcPts val="1015"/>
+              </a:lnSpc>
+            </a:pPr>
+            <a:r>
+              <a:rPr sz="700" b="0">
+                <a:solidFill>
+                  <a:srgbClr val="12151C"/>
+                </a:solidFill>
+                <a:latin typeface="맑은 고딕"/>
+                <a:ea typeface="맑은 고딕"/>
+              </a:rPr>
+              <a:t>포트폴리오</a:t>
+            </a:r>
+          </a:p>
+        </p:txBody>
+      </p:sp>
+      <p:cxnSp>
+        <p:nvCxnSpPr>
+          <p:cNvPr id="12" name="Connector 11"/>
+          <p:cNvCxnSpPr/>
+          <p:nvPr/>
+        </p:nvCxnSpPr>
+        <p:spPr>
+          <a:xfrm>
+            <a:off x="252000" y="1216800"/>
+            <a:ext cx="1512000" cy="0"/>
+          </a:xfrm>
+          <a:prstGeom prst="line">
+            <a:avLst/>
+          </a:prstGeom>
+          <a:ln w="3600">
+            <a:solidFill>
+              <a:srgbClr val="078065"/>
+            </a:solidFill>
+          </a:ln>
+        </p:spPr>
+      </p:cxnSp>
+      <p:sp>
+        <p:nvSpPr>
+          <p:cNvPr id="13" name="Rectangle 12"/>
           <p:cNvSpPr/>
           <p:nvPr/>
         </p:nvSpPr>
         <p:spPr>
           <a:xfrm>
-            <a:off x="2822400" y="1616400"/>
-            <a:ext cx="43200" cy="43200"/>
-          </a:xfrm>
-          <a:prstGeom prst="ellipse">
+            <a:off x="2196000" y="396000"/>
+            <a:ext cx="720000" cy="720000"/>
+          </a:xfrm>
+          <a:prstGeom prst="rect">
             <a:avLst/>
           </a:prstGeom>
-          <a:solidFill>
-            <a:srgbClr val="12151C">
-              <a:alpha val="50000"/>
-            </a:srgbClr>
-          </a:solidFill>
-          <a:ln>
-            <a:noFill/>
+          <a:noFill/>
+          <a:ln w="4320">
+            <a:solidFill>
+              <a:srgbClr val="0E3C37"/>
+            </a:solidFill>
+            <a:prstDash val="dash"/>
           </a:ln>
         </p:spPr>
         <p:txBody>
@@ -3704,32 +3949,121 @@
       </p:sp>
       <p:sp>
         <p:nvSpPr>
-          <p:cNvPr id="7" name="Oval 6"/>
-          <p:cNvSpPr/>
+          <p:cNvPr id="14" name="텍스트"/>
+          <p:cNvSpPr txBox="1"/>
           <p:nvPr/>
         </p:nvSpPr>
         <p:spPr>
           <a:xfrm>
-            <a:off x="2930400" y="1616400"/>
-            <a:ext cx="43200" cy="43200"/>
-          </a:xfrm>
-          <a:prstGeom prst="ellipse">
+            <a:off x="2196000" y="396000"/>
+            <a:ext cx="720000" cy="720000"/>
+          </a:xfrm>
+          <a:prstGeom prst="rect">
             <a:avLst/>
           </a:prstGeom>
-          <a:solidFill>
-            <a:srgbClr val="12151C">
-              <a:alpha val="50000"/>
-            </a:srgbClr>
-          </a:solidFill>
-          <a:ln>
-            <a:noFill/>
-          </a:ln>
-        </p:spPr>
-        <p:txBody>
-          <a:bodyPr rtlCol="0" anchor="ctr"/>
-          <a:lstStyle/>
-          <a:p>
-            <a:pPr algn="ctr"/>
+          <a:noFill/>
+        </p:spPr>
+        <p:txBody>
+          <a:bodyPr wrap="square" lIns="0" rIns="0" tIns="0" bIns="0" anchor="ctr">
+            <a:spAutoFit/>
+          </a:bodyPr>
+          <a:lstStyle/>
+          <a:p>
+            <a:pPr algn="ctr">
+              <a:lnSpc>
+                <a:spcPts val="1305"/>
+              </a:lnSpc>
+            </a:pPr>
+            <a:r>
+              <a:rPr sz="900" b="1">
+                <a:solidFill>
+                  <a:srgbClr val="0E3C37"/>
+                </a:solidFill>
+                <a:latin typeface="맑은 고딕"/>
+                <a:ea typeface="맑은 고딕"/>
+              </a:rPr>
+              <a:t>QR</a:t>
+            </a:r>
+          </a:p>
+        </p:txBody>
+      </p:sp>
+      <p:sp>
+        <p:nvSpPr>
+          <p:cNvPr id="15" name="텍스트"/>
+          <p:cNvSpPr txBox="1"/>
+          <p:nvPr/>
+        </p:nvSpPr>
+        <p:spPr>
+          <a:xfrm>
+            <a:off x="2196000" y="1209600"/>
+            <a:ext cx="720000" cy="118111"/>
+          </a:xfrm>
+          <a:prstGeom prst="rect">
+            <a:avLst/>
+          </a:prstGeom>
+          <a:noFill/>
+        </p:spPr>
+        <p:txBody>
+          <a:bodyPr wrap="square" lIns="0" rIns="0" tIns="0" bIns="0" anchor="t">
+            <a:spAutoFit/>
+          </a:bodyPr>
+          <a:lstStyle/>
+          <a:p>
+            <a:pPr algn="ctr">
+              <a:lnSpc>
+                <a:spcPts val="899"/>
+              </a:lnSpc>
+            </a:pPr>
+            <a:r>
+              <a:rPr sz="620" b="0">
+                <a:solidFill>
+                  <a:srgbClr val="12151C"/>
+                </a:solidFill>
+                <a:latin typeface="맑은 고딕"/>
+                <a:ea typeface="맑은 고딕"/>
+              </a:rPr>
+              <a:t>www.example.com</a:t>
+            </a:r>
+          </a:p>
+        </p:txBody>
+      </p:sp>
+      <p:sp>
+        <p:nvSpPr>
+          <p:cNvPr id="16" name="텍스트"/>
+          <p:cNvSpPr txBox="1"/>
+          <p:nvPr/>
+        </p:nvSpPr>
+        <p:spPr>
+          <a:xfrm>
+            <a:off x="2196000" y="1353600"/>
+            <a:ext cx="720000" cy="118111"/>
+          </a:xfrm>
+          <a:prstGeom prst="rect">
+            <a:avLst/>
+          </a:prstGeom>
+          <a:noFill/>
+        </p:spPr>
+        <p:txBody>
+          <a:bodyPr wrap="square" lIns="0" rIns="0" tIns="0" bIns="0" anchor="t">
+            <a:spAutoFit/>
+          </a:bodyPr>
+          <a:lstStyle/>
+          <a:p>
+            <a:pPr algn="ctr">
+              <a:lnSpc>
+                <a:spcPts val="899"/>
+              </a:lnSpc>
+            </a:pPr>
+            <a:r>
+              <a:rPr sz="620" b="0">
+                <a:solidFill>
+                  <a:srgbClr val="0E3C37"/>
+                </a:solidFill>
+                <a:latin typeface="맑은 고딕"/>
+                <a:ea typeface="맑은 고딕"/>
+              </a:rPr>
+              <a:t>평일 10:00 – 19:00</a:t>
+            </a:r>
           </a:p>
         </p:txBody>
       </p:sp>
